--- a/assets/figures-editable/c3-c4/c3-e15.pptx
+++ b/assets/figures-editable/c3-c4/c3-e15.pptx
@@ -3104,8 +3104,8 @@
         </p:nvSpPr>
         <p:spPr>
           <a:xfrm>
-            <a:off x="274320" y="137160"/>
-            <a:ext cx="11612880" cy="365760"/>
+            <a:off x="274320" y="118872"/>
+            <a:ext cx="11612880" cy="340105"/>
           </a:xfrm>
           <a:prstGeom prst="rect">
             <a:avLst/>
@@ -3114,7 +3114,7 @@
           <a:effectLst/>
         </p:spPr>
         <p:txBody>
-          <a:bodyPr wrap="square" lIns="27432" rIns="27432" tIns="18288" bIns="18288" anchor="ctr">
+          <a:bodyPr wrap="none" lIns="18288" rIns="18288" tIns="18288" bIns="18288" anchor="t">
             <a:spAutoFit/>
           </a:bodyPr>
           <a:lstStyle/>
@@ -3125,7 +3125,7 @@
               </a:spcAft>
             </a:pPr>
             <a:r>
-              <a:rPr sz="2100" b="0" i="0">
+              <a:rPr sz="1900" b="1" i="0">
                 <a:solidFill>
                   <a:srgbClr val="8EDBD4"/>
                 </a:solidFill>
@@ -3138,54 +3138,24 @@
       </p:sp>
       <p:sp>
         <p:nvSpPr>
-          <p:cNvPr id="3" name="C3-E15 rect 1" descr="sci-ppt:o001"/>
+          <p:cNvPr id="3" name="C3-E15 round_rect 1" descr="sci-ppt:o001"/>
           <p:cNvSpPr/>
           <p:nvPr/>
         </p:nvSpPr>
         <p:spPr>
           <a:xfrm>
-            <a:off x="822960" y="1051560"/>
-            <a:ext cx="9875520" cy="2377440"/>
-          </a:xfrm>
-          <a:prstGeom prst="rect">
-            <a:avLst/>
-          </a:prstGeom>
-          <a:noFill/>
-          <a:ln w="19050">
-            <a:solidFill>
-              <a:srgbClr val="B4C7D2"/>
-            </a:solidFill>
-          </a:ln>
-          <a:effectLst/>
-        </p:spPr>
-        <p:txBody>
-          <a:bodyPr rtlCol="0" anchor="ctr"/>
-          <a:lstStyle/>
-          <a:p>
-            <a:pPr algn="ctr"/>
-          </a:p>
-        </p:txBody>
-      </p:sp>
-      <p:sp>
-        <p:nvSpPr>
-          <p:cNvPr id="4" name="C3-E15 ellipse 2" descr="sci-ppt:o002"/>
-          <p:cNvSpPr/>
-          <p:nvPr/>
-        </p:nvSpPr>
-        <p:spPr>
-          <a:xfrm>
-            <a:off x="2194560" y="1600200"/>
-            <a:ext cx="1280160" cy="1280160"/>
-          </a:xfrm>
-          <a:prstGeom prst="ellipse">
+            <a:off x="365760" y="914400"/>
+            <a:ext cx="3657600" cy="4023360"/>
+          </a:xfrm>
+          <a:prstGeom prst="roundRect">
             <a:avLst/>
           </a:prstGeom>
           <a:solidFill>
             <a:srgbClr val="213E4B"/>
           </a:solidFill>
-          <a:ln w="19050">
+          <a:ln w="20320">
             <a:solidFill>
-              <a:srgbClr val="B4C7D2"/>
+              <a:srgbClr val="8EDBD4"/>
             </a:solidFill>
           </a:ln>
           <a:effectLst/>
@@ -3200,14 +3170,14 @@
       </p:sp>
       <p:sp>
         <p:nvSpPr>
-          <p:cNvPr id="5" name="C3-E15 text 3" descr="sci-ppt:o003"/>
+          <p:cNvPr id="4" name="C3-E15 text 2" descr="sci-ppt:o002"/>
           <p:cNvSpPr txBox="1"/>
           <p:nvPr/>
         </p:nvSpPr>
         <p:spPr>
           <a:xfrm>
-            <a:off x="2423160" y="2057400"/>
-            <a:ext cx="1371600" cy="365760"/>
+            <a:off x="475488" y="969264"/>
+            <a:ext cx="3438144" cy="254889"/>
           </a:xfrm>
           <a:prstGeom prst="rect">
             <a:avLst/>
@@ -3216,7 +3186,7 @@
           <a:effectLst/>
         </p:spPr>
         <p:txBody>
-          <a:bodyPr wrap="square" lIns="27432" rIns="27432" tIns="18288" bIns="18288" anchor="ctr">
+          <a:bodyPr wrap="none" lIns="18288" rIns="18288" tIns="18288" bIns="18288" anchor="t">
             <a:spAutoFit/>
           </a:bodyPr>
           <a:lstStyle/>
@@ -3227,57 +3197,73 @@
               </a:spcAft>
             </a:pPr>
             <a:r>
-              <a:rPr sz="1700" b="0" i="0">
+              <a:rPr sz="1350" b="1" i="0">
                 <a:solidFill>
-                  <a:srgbClr val="E7F0F3"/>
+                  <a:srgbClr val="8EDBD4"/>
                 </a:solidFill>
                 <a:latin typeface="Arial"/>
               </a:rPr>
-              <a:t>p_g</a:t>
-            </a:r>
-          </a:p>
-        </p:txBody>
-      </p:sp>
-      <p:sp>
-        <p:nvSpPr>
-          <p:cNvPr id="6" name="C3-E15 text 4" descr="sci-ppt:o004"/>
-          <p:cNvSpPr txBox="1"/>
+              <a:t>Cavity (gas inside liquid)</a:t>
+            </a:r>
+          </a:p>
+        </p:txBody>
+      </p:sp>
+      <p:sp>
+        <p:nvSpPr>
+          <p:cNvPr id="5" name="C3-E15 ellipse 3" descr="sci-ppt:o003"/>
+          <p:cNvSpPr/>
           <p:nvPr/>
         </p:nvSpPr>
         <p:spPr>
           <a:xfrm>
-            <a:off x="4663440" y="1874519"/>
-            <a:ext cx="4297680" cy="548640"/>
-          </a:xfrm>
-          <a:prstGeom prst="rect">
+            <a:off x="1417319" y="2057400"/>
+            <a:ext cx="1554480" cy="1554480"/>
+          </a:xfrm>
+          <a:prstGeom prst="ellipse">
             <a:avLst/>
           </a:prstGeom>
-          <a:noFill/>
+          <a:solidFill>
+            <a:srgbClr val="0C1820"/>
+          </a:solidFill>
+          <a:ln w="27940">
+            <a:solidFill>
+              <a:srgbClr val="F2B880"/>
+            </a:solidFill>
+          </a:ln>
           <a:effectLst/>
         </p:spPr>
         <p:txBody>
-          <a:bodyPr wrap="square" lIns="27432" rIns="27432" tIns="18288" bIns="18288" anchor="ctr">
-            <a:spAutoFit/>
-          </a:bodyPr>
-          <a:lstStyle/>
-          <a:p>
-            <a:pPr algn="l">
-              <a:spcAft>
-                <a:spcPts val="0"/>
-              </a:spcAft>
-            </a:pPr>
-            <a:r>
-              <a:rPr sz="1900" b="0" i="0">
-                <a:solidFill>
-                  <a:srgbClr val="E7F0F3"/>
-                </a:solidFill>
-                <a:latin typeface="Arial"/>
-              </a:rPr>
-              <a:t>Liquid Ω(t): u = ∇φ</a:t>
-            </a:r>
-          </a:p>
-        </p:txBody>
-      </p:sp>
+          <a:bodyPr rtlCol="0" anchor="ctr"/>
+          <a:lstStyle/>
+          <a:p>
+            <a:pPr algn="ctr"/>
+          </a:p>
+        </p:txBody>
+      </p:sp>
+      <p:cxnSp>
+        <p:nvCxnSpPr>
+          <p:cNvPr id="6" name="C3-E15 arrow 4" descr="sci-ppt:o004"/>
+          <p:cNvCxnSpPr/>
+          <p:nvPr/>
+        </p:nvCxnSpPr>
+        <p:spPr>
+          <a:xfrm flipH="1">
+            <a:off x="2404701" y="2335039"/>
+            <a:ext cx="385259" cy="323271"/>
+          </a:xfrm>
+          <a:prstGeom prst="line">
+            <a:avLst/>
+          </a:prstGeom>
+          <a:ln w="38100">
+            <a:solidFill>
+              <a:srgbClr val="F28BA0"/>
+            </a:solidFill>
+            <a:headEnd type="none" w="med" len="med"/>
+            <a:tailEnd type="triangle" w="med" len="med"/>
+          </a:ln>
+          <a:effectLst/>
+        </p:spPr>
+      </p:cxnSp>
       <p:cxnSp>
         <p:nvCxnSpPr>
           <p:cNvPr id="7" name="C3-E15 arrow 5" descr="sci-ppt:o005"/>
@@ -3285,16 +3271,16 @@
           <p:nvPr/>
         </p:nvCxnSpPr>
         <p:spPr>
-          <a:xfrm flipH="1">
-            <a:off x="3520440" y="2240280"/>
-            <a:ext cx="502920" cy="0"/>
+          <a:xfrm>
+            <a:off x="1599159" y="2335039"/>
+            <a:ext cx="385259" cy="323271"/>
           </a:xfrm>
           <a:prstGeom prst="line">
             <a:avLst/>
           </a:prstGeom>
-          <a:ln w="25400">
+          <a:ln w="38100">
             <a:solidFill>
-              <a:srgbClr val="8EDBD4"/>
+              <a:srgbClr val="F28BA0"/>
             </a:solidFill>
             <a:headEnd type="none" w="med" len="med"/>
             <a:tailEnd type="triangle" w="med" len="med"/>
@@ -3302,16 +3288,40 @@
           <a:effectLst/>
         </p:spPr>
       </p:cxnSp>
-      <p:sp>
-        <p:nvSpPr>
-          <p:cNvPr id="8" name="C3-E15 text 6" descr="sci-ppt:o006"/>
+      <p:cxnSp>
+        <p:nvCxnSpPr>
+          <p:cNvPr id="8" name="C3-E15 arrow 6" descr="sci-ppt:o006"/>
+          <p:cNvCxnSpPr/>
+          <p:nvPr/>
+        </p:nvCxnSpPr>
+        <p:spPr>
+          <a:xfrm flipV="1">
+            <a:off x="1928728" y="3092416"/>
+            <a:ext cx="172009" cy="472590"/>
+          </a:xfrm>
+          <a:prstGeom prst="line">
+            <a:avLst/>
+          </a:prstGeom>
+          <a:ln w="38100">
+            <a:solidFill>
+              <a:srgbClr val="F28BA0"/>
+            </a:solidFill>
+            <a:headEnd type="none" w="med" len="med"/>
+            <a:tailEnd type="triangle" w="med" len="med"/>
+          </a:ln>
+          <a:effectLst/>
+        </p:spPr>
+      </p:cxnSp>
+      <p:sp>
+        <p:nvSpPr>
+          <p:cNvPr id="9" name="C3-E15 text 7" descr="sci-ppt:o007"/>
           <p:cNvSpPr txBox="1"/>
           <p:nvPr/>
         </p:nvSpPr>
         <p:spPr>
           <a:xfrm>
-            <a:off x="3657600" y="2606040"/>
-            <a:ext cx="4572000" cy="365760"/>
+            <a:off x="548640" y="3840480"/>
+            <a:ext cx="3291840" cy="231648"/>
           </a:xfrm>
           <a:prstGeom prst="rect">
             <a:avLst/>
@@ -3320,7 +3330,7 @@
           <a:effectLst/>
         </p:spPr>
         <p:txBody>
-          <a:bodyPr wrap="square" lIns="27432" rIns="27432" tIns="18288" bIns="18288" anchor="ctr">
+          <a:bodyPr wrap="none" lIns="18288" rIns="18288" tIns="18288" bIns="18288" anchor="t">
             <a:spAutoFit/>
           </a:bodyPr>
           <a:lstStyle/>
@@ -3331,34 +3341,240 @@
               </a:spcAft>
             </a:pPr>
             <a:r>
-              <a:rPr sz="1600" b="0" i="0">
+              <a:rPr sz="1200" b="1" i="0">
+                <a:solidFill>
+                  <a:srgbClr val="F28BA0"/>
+                </a:solidFill>
+                <a:latin typeface="Arial"/>
+              </a:rPr>
+              <a:t>n points into the gas</a:t>
+            </a:r>
+          </a:p>
+        </p:txBody>
+      </p:sp>
+      <p:sp>
+        <p:nvSpPr>
+          <p:cNvPr id="10" name="C3-E15 text 8" descr="sci-ppt:o008"/>
+          <p:cNvSpPr txBox="1"/>
+          <p:nvPr/>
+        </p:nvSpPr>
+        <p:spPr>
+          <a:xfrm>
+            <a:off x="548640" y="4251960"/>
+            <a:ext cx="3291840" cy="239395"/>
+          </a:xfrm>
+          <a:prstGeom prst="rect">
+            <a:avLst/>
+          </a:prstGeom>
+          <a:noFill/>
+          <a:effectLst/>
+        </p:spPr>
+        <p:txBody>
+          <a:bodyPr wrap="none" lIns="18288" rIns="18288" tIns="18288" bIns="18288" anchor="t">
+            <a:spAutoFit/>
+          </a:bodyPr>
+          <a:lstStyle/>
+          <a:p>
+            <a:pPr algn="l">
+              <a:spcAft>
+                <a:spcPts val="0"/>
+              </a:spcAft>
+            </a:pPr>
+            <a:r>
+              <a:rPr sz="1250" b="1" i="0">
                 <a:solidFill>
                   <a:srgbClr val="E7F0F3"/>
                 </a:solidFill>
                 <a:latin typeface="Arial"/>
               </a:rPr>
-              <a:t>n: liquid → cavity gas</a:t>
-            </a:r>
+              <a:t>κ = −2/R,  pₗ = p_g − 2σ/R</a:t>
+            </a:r>
+          </a:p>
+        </p:txBody>
+      </p:sp>
+      <p:sp>
+        <p:nvSpPr>
+          <p:cNvPr id="11" name="C3-E15 text 9" descr="sci-ppt:o009"/>
+          <p:cNvSpPr txBox="1"/>
+          <p:nvPr/>
+        </p:nvSpPr>
+        <p:spPr>
+          <a:xfrm>
+            <a:off x="548640" y="4617720"/>
+            <a:ext cx="3291840" cy="231648"/>
+          </a:xfrm>
+          <a:prstGeom prst="rect">
+            <a:avLst/>
+          </a:prstGeom>
+          <a:noFill/>
+          <a:effectLst/>
+        </p:spPr>
+        <p:txBody>
+          <a:bodyPr wrap="none" lIns="18288" rIns="18288" tIns="18288" bIns="18288" anchor="t">
+            <a:spAutoFit/>
+          </a:bodyPr>
+          <a:lstStyle/>
+          <a:p>
+            <a:pPr algn="l">
+              <a:spcAft>
+                <a:spcPts val="0"/>
+              </a:spcAft>
+            </a:pPr>
+            <a:r>
+              <a:rPr sz="1200" b="0" i="0">
+                <a:solidFill>
+                  <a:srgbClr val="B4C7D2"/>
+                </a:solidFill>
+                <a:latin typeface="Arial"/>
+              </a:rPr>
+              <a:t>R = 10 µm: −2σ/R = -14.4 kPa</a:t>
+            </a:r>
+          </a:p>
+        </p:txBody>
+      </p:sp>
+      <p:sp>
+        <p:nvSpPr>
+          <p:cNvPr id="12" name="C3-E15 round_rect 10" descr="sci-ppt:o010"/>
+          <p:cNvSpPr/>
+          <p:nvPr/>
+        </p:nvSpPr>
+        <p:spPr>
+          <a:xfrm>
+            <a:off x="4206240" y="914400"/>
+            <a:ext cx="3657600" cy="4023360"/>
+          </a:xfrm>
+          <a:prstGeom prst="roundRect">
+            <a:avLst/>
+          </a:prstGeom>
+          <a:solidFill>
+            <a:srgbClr val="213E4B"/>
+          </a:solidFill>
+          <a:ln w="20320">
+            <a:solidFill>
+              <a:srgbClr val="F2B880"/>
+            </a:solidFill>
+          </a:ln>
+          <a:effectLst/>
+        </p:spPr>
+        <p:txBody>
+          <a:bodyPr rtlCol="0" anchor="ctr"/>
+          <a:lstStyle/>
+          <a:p>
+            <a:pPr algn="ctr"/>
+          </a:p>
+        </p:txBody>
+      </p:sp>
+      <p:sp>
+        <p:nvSpPr>
+          <p:cNvPr id="13" name="C3-E15 text 11" descr="sci-ppt:o011"/>
+          <p:cNvSpPr txBox="1"/>
+          <p:nvPr/>
+        </p:nvSpPr>
+        <p:spPr>
+          <a:xfrm>
+            <a:off x="4315968" y="969264"/>
+            <a:ext cx="3438144" cy="254889"/>
+          </a:xfrm>
+          <a:prstGeom prst="rect">
+            <a:avLst/>
+          </a:prstGeom>
+          <a:noFill/>
+          <a:effectLst/>
+        </p:spPr>
+        <p:txBody>
+          <a:bodyPr wrap="none" lIns="18288" rIns="18288" tIns="18288" bIns="18288" anchor="t">
+            <a:spAutoFit/>
+          </a:bodyPr>
+          <a:lstStyle/>
+          <a:p>
+            <a:pPr algn="l">
+              <a:spcAft>
+                <a:spcPts val="0"/>
+              </a:spcAft>
+            </a:pPr>
+            <a:r>
+              <a:rPr sz="1350" b="1" i="0">
+                <a:solidFill>
+                  <a:srgbClr val="F2B880"/>
+                </a:solidFill>
+                <a:latin typeface="Arial"/>
+              </a:rPr>
+              <a:t>Liquid jet (liquid inside gas)</a:t>
+            </a:r>
+          </a:p>
+        </p:txBody>
+      </p:sp>
+      <p:sp>
+        <p:nvSpPr>
+          <p:cNvPr id="14" name="C3-E15 rect 12" descr="sci-ppt:o012"/>
+          <p:cNvSpPr/>
+          <p:nvPr/>
+        </p:nvSpPr>
+        <p:spPr>
+          <a:xfrm>
+            <a:off x="5120640" y="1737360"/>
+            <a:ext cx="1828800" cy="1554480"/>
+          </a:xfrm>
+          <a:prstGeom prst="rect">
+            <a:avLst/>
+          </a:prstGeom>
+          <a:solidFill>
+            <a:srgbClr val="1E4A5A"/>
+          </a:solidFill>
+          <a:ln w="30480">
+            <a:solidFill>
+              <a:srgbClr val="8EDBD4"/>
+            </a:solidFill>
+          </a:ln>
+          <a:effectLst/>
+        </p:spPr>
+        <p:txBody>
+          <a:bodyPr rtlCol="0" anchor="ctr"/>
+          <a:lstStyle/>
+          <a:p>
+            <a:pPr algn="ctr"/>
           </a:p>
         </p:txBody>
       </p:sp>
       <p:cxnSp>
         <p:nvCxnSpPr>
-          <p:cNvPr id="9" name="C3-E15 arrow 7" descr="sci-ppt:o007"/>
+          <p:cNvPr id="15" name="C3-E15 line 13" descr="sci-ppt:o013"/>
           <p:cNvCxnSpPr/>
           <p:nvPr/>
         </p:nvCxnSpPr>
         <p:spPr>
           <a:xfrm>
-            <a:off x="8778240" y="2011680"/>
-            <a:ext cx="822960" cy="0"/>
+            <a:off x="5120640" y="3291840"/>
+            <a:ext cx="1828800" cy="0"/>
           </a:xfrm>
           <a:prstGeom prst="line">
             <a:avLst/>
           </a:prstGeom>
-          <a:ln w="25400">
+          <a:ln w="30480">
             <a:solidFill>
               <a:srgbClr val="8EDBD4"/>
+            </a:solidFill>
+          </a:ln>
+          <a:effectLst/>
+        </p:spPr>
+      </p:cxnSp>
+      <p:cxnSp>
+        <p:nvCxnSpPr>
+          <p:cNvPr id="16" name="C3-E15 arrow 14" descr="sci-ppt:o014"/>
+          <p:cNvCxnSpPr/>
+          <p:nvPr/>
+        </p:nvCxnSpPr>
+        <p:spPr>
+          <a:xfrm flipV="1">
+            <a:off x="5486400" y="1234440"/>
+            <a:ext cx="0" cy="502920"/>
+          </a:xfrm>
+          <a:prstGeom prst="line">
+            <a:avLst/>
+          </a:prstGeom>
+          <a:ln w="38100">
+            <a:solidFill>
+              <a:srgbClr val="F28BA0"/>
             </a:solidFill>
             <a:headEnd type="none" w="med" len="med"/>
             <a:tailEnd type="triangle" w="med" len="med"/>
@@ -3366,16 +3582,40 @@
           <a:effectLst/>
         </p:spPr>
       </p:cxnSp>
-      <p:sp>
-        <p:nvSpPr>
-          <p:cNvPr id="10" name="C3-E15 text 8" descr="sci-ppt:o008"/>
+      <p:cxnSp>
+        <p:nvCxnSpPr>
+          <p:cNvPr id="17" name="C3-E15 arrow 15" descr="sci-ppt:o015"/>
+          <p:cNvCxnSpPr/>
+          <p:nvPr/>
+        </p:nvCxnSpPr>
+        <p:spPr>
+          <a:xfrm flipV="1">
+            <a:off x="6583680" y="1234440"/>
+            <a:ext cx="0" cy="502920"/>
+          </a:xfrm>
+          <a:prstGeom prst="line">
+            <a:avLst/>
+          </a:prstGeom>
+          <a:ln w="38100">
+            <a:solidFill>
+              <a:srgbClr val="F28BA0"/>
+            </a:solidFill>
+            <a:headEnd type="none" w="med" len="med"/>
+            <a:tailEnd type="triangle" w="med" len="med"/>
+          </a:ln>
+          <a:effectLst/>
+        </p:spPr>
+      </p:cxnSp>
+      <p:sp>
+        <p:nvSpPr>
+          <p:cNvPr id="18" name="C3-E15 text 16" descr="sci-ppt:o016"/>
           <p:cNvSpPr txBox="1"/>
           <p:nvPr/>
         </p:nvSpPr>
         <p:spPr>
           <a:xfrm>
-            <a:off x="7863840" y="1188720"/>
-            <a:ext cx="2743200" cy="365760"/>
+            <a:off x="4389120" y="3840480"/>
+            <a:ext cx="3291840" cy="231648"/>
           </a:xfrm>
           <a:prstGeom prst="rect">
             <a:avLst/>
@@ -3384,7 +3624,7 @@
           <a:effectLst/>
         </p:spPr>
         <p:txBody>
-          <a:bodyPr wrap="square" lIns="27432" rIns="27432" tIns="18288" bIns="18288" anchor="ctr">
+          <a:bodyPr wrap="none" lIns="18288" rIns="18288" tIns="18288" bIns="18288" anchor="t">
             <a:spAutoFit/>
           </a:bodyPr>
           <a:lstStyle/>
@@ -3395,27 +3635,67 @@
               </a:spcAft>
             </a:pPr>
             <a:r>
-              <a:rPr sz="1700" b="0" i="0">
+              <a:rPr sz="1200" b="1" i="0">
+                <a:solidFill>
+                  <a:srgbClr val="F28BA0"/>
+                </a:solidFill>
+                <a:latin typeface="Arial"/>
+              </a:rPr>
+              <a:t>n points out into the gas</a:t>
+            </a:r>
+          </a:p>
+        </p:txBody>
+      </p:sp>
+      <p:sp>
+        <p:nvSpPr>
+          <p:cNvPr id="19" name="C3-E15 text 17" descr="sci-ppt:o017"/>
+          <p:cNvSpPr txBox="1"/>
+          <p:nvPr/>
+        </p:nvSpPr>
+        <p:spPr>
+          <a:xfrm>
+            <a:off x="4389120" y="4251960"/>
+            <a:ext cx="3291840" cy="239395"/>
+          </a:xfrm>
+          <a:prstGeom prst="rect">
+            <a:avLst/>
+          </a:prstGeom>
+          <a:noFill/>
+          <a:effectLst/>
+        </p:spPr>
+        <p:txBody>
+          <a:bodyPr wrap="none" lIns="18288" rIns="18288" tIns="18288" bIns="18288" anchor="t">
+            <a:spAutoFit/>
+          </a:bodyPr>
+          <a:lstStyle/>
+          <a:p>
+            <a:pPr algn="l">
+              <a:spcAft>
+                <a:spcPts val="0"/>
+              </a:spcAft>
+            </a:pPr>
+            <a:r>
+              <a:rPr sz="1250" b="1" i="0">
                 <a:solidFill>
                   <a:srgbClr val="E7F0F3"/>
                 </a:solidFill>
                 <a:latin typeface="Arial"/>
               </a:rPr>
-              <a:t>Outlet / meniscus</a:t>
-            </a:r>
-          </a:p>
-        </p:txBody>
-      </p:sp>
-      <p:sp>
-        <p:nvSpPr>
-          <p:cNvPr id="11" name="C3-E15 text 9" descr="sci-ppt:o009"/>
+              <a:t>κ = +1/aⱼ,  pₗ = p_g + σ/aⱼ</a:t>
+            </a:r>
+          </a:p>
+        </p:txBody>
+      </p:sp>
+      <p:sp>
+        <p:nvSpPr>
+          <p:cNvPr id="20" name="C3-E15 text 18" descr="sci-ppt:o018"/>
           <p:cNvSpPr txBox="1"/>
           <p:nvPr/>
         </p:nvSpPr>
         <p:spPr>
           <a:xfrm>
-            <a:off x="1005840" y="594360"/>
-            <a:ext cx="10058400" cy="365760"/>
+            <a:off x="4389120" y="4617720"/>
+            <a:ext cx="3291840" cy="231648"/>
           </a:xfrm>
           <a:prstGeom prst="rect">
             <a:avLst/>
@@ -3424,7 +3704,7 @@
           <a:effectLst/>
         </p:spPr>
         <p:txBody>
-          <a:bodyPr wrap="square" lIns="27432" rIns="27432" tIns="18288" bIns="18288" anchor="ctr">
+          <a:bodyPr wrap="none" lIns="18288" rIns="18288" tIns="18288" bIns="18288" anchor="t">
             <a:spAutoFit/>
           </a:bodyPr>
           <a:lstStyle/>
@@ -3435,27 +3715,99 @@
               </a:spcAft>
             </a:pPr>
             <a:r>
-              <a:rPr sz="1800" b="0" i="0">
+              <a:rPr sz="1200" b="0" i="0">
+                <a:solidFill>
+                  <a:srgbClr val="B4C7D2"/>
+                </a:solidFill>
+                <a:latin typeface="Arial"/>
+              </a:rPr>
+              <a:t>aⱼ = 5 µm: +σ/aⱼ = +14.4 kPa</a:t>
+            </a:r>
+          </a:p>
+        </p:txBody>
+      </p:sp>
+      <p:sp>
+        <p:nvSpPr>
+          <p:cNvPr id="21" name="C3-E15 round_rect 19" descr="sci-ppt:o019"/>
+          <p:cNvSpPr/>
+          <p:nvPr/>
+        </p:nvSpPr>
+        <p:spPr>
+          <a:xfrm>
+            <a:off x="8046720" y="914400"/>
+            <a:ext cx="3794760" cy="4023360"/>
+          </a:xfrm>
+          <a:prstGeom prst="roundRect">
+            <a:avLst/>
+          </a:prstGeom>
+          <a:solidFill>
+            <a:srgbClr val="213E4B"/>
+          </a:solidFill>
+          <a:ln w="20320">
+            <a:solidFill>
+              <a:srgbClr val="8EDBD4"/>
+            </a:solidFill>
+          </a:ln>
+          <a:effectLst/>
+        </p:spPr>
+        <p:txBody>
+          <a:bodyPr rtlCol="0" anchor="ctr"/>
+          <a:lstStyle/>
+          <a:p>
+            <a:pPr algn="ctr"/>
+          </a:p>
+        </p:txBody>
+      </p:sp>
+      <p:sp>
+        <p:nvSpPr>
+          <p:cNvPr id="22" name="C3-E15 text 20" descr="sci-ppt:o020"/>
+          <p:cNvSpPr txBox="1"/>
+          <p:nvPr/>
+        </p:nvSpPr>
+        <p:spPr>
+          <a:xfrm>
+            <a:off x="8156448" y="969264"/>
+            <a:ext cx="3575304" cy="247142"/>
+          </a:xfrm>
+          <a:prstGeom prst="rect">
+            <a:avLst/>
+          </a:prstGeom>
+          <a:noFill/>
+          <a:effectLst/>
+        </p:spPr>
+        <p:txBody>
+          <a:bodyPr wrap="none" lIns="18288" rIns="18288" tIns="18288" bIns="18288" anchor="t">
+            <a:spAutoFit/>
+          </a:bodyPr>
+          <a:lstStyle/>
+          <a:p>
+            <a:pPr algn="l">
+              <a:spcAft>
+                <a:spcPts val="0"/>
+              </a:spcAft>
+            </a:pPr>
+            <a:r>
+              <a:rPr sz="1300" b="1" i="0">
                 <a:solidFill>
                   <a:srgbClr val="8EDBD4"/>
                 </a:solidFill>
                 <a:latin typeface="Arial"/>
               </a:rPr>
-              <a:t>Walls, cavity and outlet are distinct boundaries.</a:t>
-            </a:r>
-          </a:p>
-        </p:txBody>
-      </p:sp>
-      <p:sp>
-        <p:nvSpPr>
-          <p:cNvPr id="12" name="C3-E15 text 10" descr="sci-ppt:o010"/>
+              <a:t>Dynamic condition on Γ</a:t>
+            </a:r>
+          </a:p>
+        </p:txBody>
+      </p:sp>
+      <p:sp>
+        <p:nvSpPr>
+          <p:cNvPr id="23" name="C3-E15 text 21" descr="sci-ppt:o021"/>
           <p:cNvSpPr txBox="1"/>
           <p:nvPr/>
         </p:nvSpPr>
         <p:spPr>
           <a:xfrm>
-            <a:off x="1188720" y="3566160"/>
-            <a:ext cx="10058400" cy="274320"/>
+            <a:off x="8183879" y="1371600"/>
+            <a:ext cx="3566160" cy="239395"/>
           </a:xfrm>
           <a:prstGeom prst="rect">
             <a:avLst/>
@@ -3464,7 +3816,7 @@
           <a:effectLst/>
         </p:spPr>
         <p:txBody>
-          <a:bodyPr wrap="square" lIns="27432" rIns="27432" tIns="18288" bIns="18288" anchor="ctr">
+          <a:bodyPr wrap="none" lIns="18288" rIns="18288" tIns="18288" bIns="18288" anchor="t">
             <a:spAutoFit/>
           </a:bodyPr>
           <a:lstStyle/>
@@ -3475,49 +3827,27 @@
               </a:spcAft>
             </a:pPr>
             <a:r>
-              <a:rPr sz="1700" b="0" i="0">
+              <a:rPr sz="1250" b="1" i="0">
                 <a:solidFill>
-                  <a:srgbClr val="8EDBD4"/>
+                  <a:srgbClr val="E7F0F3"/>
                 </a:solidFill>
                 <a:latin typeface="Arial"/>
               </a:rPr>
-              <a:t>Cavity κ = −2/R; exterior cylindrical jet κ = +1/a_j.</a:t>
-            </a:r>
-          </a:p>
-        </p:txBody>
-      </p:sp>
-      <p:cxnSp>
-        <p:nvCxnSpPr>
-          <p:cNvPr id="13" name="C3-E15 line 11" descr="sci-ppt:o011"/>
-          <p:cNvCxnSpPr/>
-          <p:nvPr/>
-        </p:nvCxnSpPr>
-        <p:spPr>
-          <a:xfrm>
-            <a:off x="274320" y="3977639"/>
-            <a:ext cx="11612880" cy="0"/>
-          </a:xfrm>
-          <a:prstGeom prst="line">
-            <a:avLst/>
-          </a:prstGeom>
-          <a:ln w="12700">
-            <a:solidFill>
-              <a:srgbClr val="405967"/>
-            </a:solidFill>
-          </a:ln>
-          <a:effectLst/>
-        </p:spPr>
-      </p:cxnSp>
-      <p:sp>
-        <p:nvSpPr>
-          <p:cNvPr id="14" name="C3-E15 text 12" descr="sci-ppt:o012"/>
+              <a:t>pₗ = p_g + σκ,   κ = ∇ₛ·n</a:t>
+            </a:r>
+          </a:p>
+        </p:txBody>
+      </p:sp>
+      <p:sp>
+        <p:nvSpPr>
+          <p:cNvPr id="24" name="C3-E15 text 22" descr="sci-ppt:o022"/>
           <p:cNvSpPr txBox="1"/>
           <p:nvPr/>
         </p:nvSpPr>
         <p:spPr>
           <a:xfrm>
-            <a:off x="320040" y="4096512"/>
-            <a:ext cx="5715000" cy="246888"/>
+            <a:off x="8183879" y="2011680"/>
+            <a:ext cx="3566160" cy="239395"/>
           </a:xfrm>
           <a:prstGeom prst="rect">
             <a:avLst/>
@@ -3526,7 +3856,7 @@
           <a:effectLst/>
         </p:spPr>
         <p:txBody>
-          <a:bodyPr wrap="square" lIns="27432" rIns="27432" tIns="18288" bIns="18288" anchor="ctr">
+          <a:bodyPr wrap="none" lIns="18288" rIns="18288" tIns="18288" bIns="18288" anchor="t">
             <a:spAutoFit/>
           </a:bodyPr>
           <a:lstStyle/>
@@ -3537,27 +3867,139 @@
               </a:spcAft>
             </a:pPr>
             <a:r>
-              <a:rPr sz="1150" b="0" i="0">
+              <a:rPr sz="1250" b="1" i="0">
+                <a:solidFill>
+                  <a:srgbClr val="F2B880"/>
+                </a:solidFill>
+                <a:latin typeface="Arial"/>
+              </a:rPr>
+              <a:t>Dφ_Γ/Dt = ½|∇φ|² + (p∞ − p_g − σκ)/ρ</a:t>
+            </a:r>
+          </a:p>
+        </p:txBody>
+      </p:sp>
+      <p:sp>
+        <p:nvSpPr>
+          <p:cNvPr id="25" name="C3-E15 text 23" descr="sci-ppt:o023"/>
+          <p:cNvSpPr txBox="1"/>
+          <p:nvPr/>
+        </p:nvSpPr>
+        <p:spPr>
+          <a:xfrm>
+            <a:off x="8183879" y="2926080"/>
+            <a:ext cx="3566160" cy="417576"/>
+          </a:xfrm>
+          <a:prstGeom prst="rect">
+            <a:avLst/>
+          </a:prstGeom>
+          <a:noFill/>
+          <a:effectLst/>
+        </p:spPr>
+        <p:txBody>
+          <a:bodyPr wrap="none" lIns="18288" rIns="18288" tIns="18288" bIns="18288" anchor="t">
+            <a:spAutoFit/>
+          </a:bodyPr>
+          <a:lstStyle/>
+          <a:p>
+            <a:pPr algn="l">
+              <a:spcAft>
+                <a:spcPts val="0"/>
+              </a:spcAft>
+            </a:pPr>
+            <a:r>
+              <a:rPr sz="1200" b="0" i="0">
+                <a:solidFill>
+                  <a:srgbClr val="E7F0F3"/>
+                </a:solidFill>
+                <a:latin typeface="Arial"/>
+              </a:rPr>
+              <a:t>D/Dt = ∂ₜ + u·∇ follows the moving surface</a:t>
+            </a:r>
+          </a:p>
+          <a:p>
+            <a:pPr algn="l">
+              <a:spcAft>
+                <a:spcPts val="0"/>
+              </a:spcAft>
+            </a:pPr>
+            <a:r>
+              <a:rPr sz="1200" b="0" i="0">
+                <a:solidFill>
+                  <a:srgbClr val="E7F0F3"/>
+                </a:solidFill>
+                <a:latin typeface="Arial"/>
+              </a:rPr>
+              <a:t>point.</a:t>
+            </a:r>
+          </a:p>
+        </p:txBody>
+      </p:sp>
+      <p:sp>
+        <p:nvSpPr>
+          <p:cNvPr id="26" name="C3-E15 text 24" descr="sci-ppt:o024"/>
+          <p:cNvSpPr txBox="1"/>
+          <p:nvPr/>
+        </p:nvSpPr>
+        <p:spPr>
+          <a:xfrm>
+            <a:off x="8183879" y="3657600"/>
+            <a:ext cx="3566160" cy="417576"/>
+          </a:xfrm>
+          <a:prstGeom prst="rect">
+            <a:avLst/>
+          </a:prstGeom>
+          <a:noFill/>
+          <a:effectLst/>
+        </p:spPr>
+        <p:txBody>
+          <a:bodyPr wrap="none" lIns="18288" rIns="18288" tIns="18288" bIns="18288" anchor="t">
+            <a:spAutoFit/>
+          </a:bodyPr>
+          <a:lstStyle/>
+          <a:p>
+            <a:pPr algn="l">
+              <a:spcAft>
+                <a:spcPts val="0"/>
+              </a:spcAft>
+            </a:pPr>
+            <a:r>
+              <a:rPr sz="1200" b="0" i="0">
                 <a:solidFill>
                   <a:srgbClr val="B4C7D2"/>
                 </a:solidFill>
                 <a:latin typeface="Arial"/>
               </a:rPr>
-              <a:t>• p_g gas; p_l adjacent liquid</a:t>
-            </a:r>
-          </a:p>
-        </p:txBody>
-      </p:sp>
-      <p:sp>
-        <p:nvSpPr>
-          <p:cNvPr id="15" name="C3-E15 text 13" descr="sci-ppt:o013"/>
+              <a:t>A wrong sign of κ reverses the capillary</a:t>
+            </a:r>
+          </a:p>
+          <a:p>
+            <a:pPr algn="l">
+              <a:spcAft>
+                <a:spcPts val="0"/>
+              </a:spcAft>
+            </a:pPr>
+            <a:r>
+              <a:rPr sz="1200" b="0" i="0">
+                <a:solidFill>
+                  <a:srgbClr val="B4C7D2"/>
+                </a:solidFill>
+                <a:latin typeface="Arial"/>
+              </a:rPr>
+              <a:t>pressure and the surface evolution.</a:t>
+            </a:r>
+          </a:p>
+        </p:txBody>
+      </p:sp>
+      <p:sp>
+        <p:nvSpPr>
+          <p:cNvPr id="27" name="C3-E15 text 25" descr="sci-ppt:o025"/>
           <p:cNvSpPr txBox="1"/>
           <p:nvPr/>
         </p:nvSpPr>
         <p:spPr>
           <a:xfrm>
-            <a:off x="6217920" y="4096512"/>
-            <a:ext cx="5715000" cy="246888"/>
+            <a:off x="457200" y="5212080"/>
+            <a:ext cx="11338560" cy="247142"/>
           </a:xfrm>
           <a:prstGeom prst="rect">
             <a:avLst/>
@@ -3566,7 +4008,7 @@
           <a:effectLst/>
         </p:spPr>
         <p:txBody>
-          <a:bodyPr wrap="square" lIns="27432" rIns="27432" tIns="18288" bIns="18288" anchor="ctr">
+          <a:bodyPr wrap="none" lIns="18288" rIns="18288" tIns="18288" bIns="18288" anchor="t">
             <a:spAutoFit/>
           </a:bodyPr>
           <a:lstStyle/>
@@ -3577,27 +4019,27 @@
               </a:spcAft>
             </a:pPr>
             <a:r>
-              <a:rPr sz="1150" b="0" i="0">
+              <a:rPr sz="1300" b="0" i="0">
                 <a:solidFill>
-                  <a:srgbClr val="B4C7D2"/>
+                  <a:srgbClr val="F2B880"/>
                 </a:solidFill>
                 <a:latin typeface="Arial"/>
               </a:rPr>
-              <a:t>• n liquid → gas; κ = ∇ₛ·n</a:t>
-            </a:r>
-          </a:p>
-        </p:txBody>
-      </p:sp>
-      <p:sp>
-        <p:nvSpPr>
-          <p:cNvPr id="16" name="C3-E15 text 14" descr="sci-ppt:o014"/>
+              <a:t>Same σ, opposite signs: a concave-to-liquid cavity lowers the liquid pressure; a liquid cylinder raises it.</a:t>
+            </a:r>
+          </a:p>
+        </p:txBody>
+      </p:sp>
+      <p:sp>
+        <p:nvSpPr>
+          <p:cNvPr id="28" name="C3-E15 text 26" descr="sci-ppt:o026"/>
           <p:cNvSpPr txBox="1"/>
           <p:nvPr/>
         </p:nvSpPr>
         <p:spPr>
           <a:xfrm>
-            <a:off x="320040" y="4329684"/>
-            <a:ext cx="5715000" cy="246888"/>
+            <a:off x="320040" y="6510528"/>
+            <a:ext cx="11521440" cy="200660"/>
           </a:xfrm>
           <a:prstGeom prst="rect">
             <a:avLst/>
@@ -3606,247 +4048,7 @@
           <a:effectLst/>
         </p:spPr>
         <p:txBody>
-          <a:bodyPr wrap="square" lIns="27432" rIns="27432" tIns="18288" bIns="18288" anchor="ctr">
-            <a:spAutoFit/>
-          </a:bodyPr>
-          <a:lstStyle/>
-          <a:p>
-            <a:pPr algn="l">
-              <a:spcAft>
-                <a:spcPts val="0"/>
-              </a:spcAft>
-            </a:pPr>
-            <a:r>
-              <a:rPr sz="1150" b="0" i="0">
-                <a:solidFill>
-                  <a:srgbClr val="B4C7D2"/>
-                </a:solidFill>
-                <a:latin typeface="Arial"/>
-              </a:rPr>
-              <a:t>• R cavity: κ = −2/R</a:t>
-            </a:r>
-          </a:p>
-        </p:txBody>
-      </p:sp>
-      <p:sp>
-        <p:nvSpPr>
-          <p:cNvPr id="17" name="C3-E15 text 15" descr="sci-ppt:o015"/>
-          <p:cNvSpPr txBox="1"/>
-          <p:nvPr/>
-        </p:nvSpPr>
-        <p:spPr>
-          <a:xfrm>
-            <a:off x="6217920" y="4329684"/>
-            <a:ext cx="5715000" cy="246888"/>
-          </a:xfrm>
-          <a:prstGeom prst="rect">
-            <a:avLst/>
-          </a:prstGeom>
-          <a:noFill/>
-          <a:effectLst/>
-        </p:spPr>
-        <p:txBody>
-          <a:bodyPr wrap="square" lIns="27432" rIns="27432" tIns="18288" bIns="18288" anchor="ctr">
-            <a:spAutoFit/>
-          </a:bodyPr>
-          <a:lstStyle/>
-          <a:p>
-            <a:pPr algn="l">
-              <a:spcAft>
-                <a:spcPts val="0"/>
-              </a:spcAft>
-            </a:pPr>
-            <a:r>
-              <a:rPr sz="1150" b="0" i="0">
-                <a:solidFill>
-                  <a:srgbClr val="B4C7D2"/>
-                </a:solidFill>
-                <a:latin typeface="Arial"/>
-              </a:rPr>
-              <a:t>• a_j exterior jet: κ = 1/a_j</a:t>
-            </a:r>
-          </a:p>
-        </p:txBody>
-      </p:sp>
-      <p:sp>
-        <p:nvSpPr>
-          <p:cNvPr id="18" name="C3-E15 text 16" descr="sci-ppt:o016"/>
-          <p:cNvSpPr txBox="1"/>
-          <p:nvPr/>
-        </p:nvSpPr>
-        <p:spPr>
-          <a:xfrm>
-            <a:off x="320040" y="4562856"/>
-            <a:ext cx="5715000" cy="246888"/>
-          </a:xfrm>
-          <a:prstGeom prst="rect">
-            <a:avLst/>
-          </a:prstGeom>
-          <a:noFill/>
-          <a:effectLst/>
-        </p:spPr>
-        <p:txBody>
-          <a:bodyPr wrap="square" lIns="27432" rIns="27432" tIns="18288" bIns="18288" anchor="ctr">
-            <a:spAutoFit/>
-          </a:bodyPr>
-          <a:lstStyle/>
-          <a:p>
-            <a:pPr algn="l">
-              <a:spcAft>
-                <a:spcPts val="0"/>
-              </a:spcAft>
-            </a:pPr>
-            <a:r>
-              <a:rPr sz="1150" b="0" i="0">
-                <a:solidFill>
-                  <a:srgbClr val="B4C7D2"/>
-                </a:solidFill>
-                <a:latin typeface="Arial"/>
-              </a:rPr>
-              <a:t>• φ_Γ, ∇φ = u</a:t>
-            </a:r>
-          </a:p>
-        </p:txBody>
-      </p:sp>
-      <p:sp>
-        <p:nvSpPr>
-          <p:cNvPr id="19" name="C3-E15 text 17" descr="sci-ppt:o017"/>
-          <p:cNvSpPr txBox="1"/>
-          <p:nvPr/>
-        </p:nvSpPr>
-        <p:spPr>
-          <a:xfrm>
-            <a:off x="6217920" y="4562856"/>
-            <a:ext cx="5715000" cy="246888"/>
-          </a:xfrm>
-          <a:prstGeom prst="rect">
-            <a:avLst/>
-          </a:prstGeom>
-          <a:noFill/>
-          <a:effectLst/>
-        </p:spPr>
-        <p:txBody>
-          <a:bodyPr wrap="square" lIns="27432" rIns="27432" tIns="18288" bIns="18288" anchor="ctr">
-            <a:spAutoFit/>
-          </a:bodyPr>
-          <a:lstStyle/>
-          <a:p>
-            <a:pPr algn="l">
-              <a:spcAft>
-                <a:spcPts val="0"/>
-              </a:spcAft>
-            </a:pPr>
-            <a:r>
-              <a:rPr sz="1150" b="0" i="0">
-                <a:solidFill>
-                  <a:srgbClr val="B4C7D2"/>
-                </a:solidFill>
-                <a:latin typeface="Arial"/>
-              </a:rPr>
-              <a:t>• p∞, σ, ρ; D/Dt, ∂ₜ, t</a:t>
-            </a:r>
-          </a:p>
-        </p:txBody>
-      </p:sp>
-      <p:sp>
-        <p:nvSpPr>
-          <p:cNvPr id="20" name="C3-E15 text 18" descr="sci-ppt:o018"/>
-          <p:cNvSpPr txBox="1"/>
-          <p:nvPr/>
-        </p:nvSpPr>
-        <p:spPr>
-          <a:xfrm>
-            <a:off x="320040" y="5596128"/>
-            <a:ext cx="11430000" cy="292608"/>
-          </a:xfrm>
-          <a:prstGeom prst="rect">
-            <a:avLst/>
-          </a:prstGeom>
-          <a:noFill/>
-          <a:effectLst/>
-        </p:spPr>
-        <p:txBody>
-          <a:bodyPr wrap="square" lIns="27432" rIns="27432" tIns="18288" bIns="18288" anchor="ctr">
-            <a:spAutoFit/>
-          </a:bodyPr>
-          <a:lstStyle/>
-          <a:p>
-            <a:pPr algn="l">
-              <a:spcAft>
-                <a:spcPts val="0"/>
-              </a:spcAft>
-            </a:pPr>
-            <a:r>
-              <a:rPr sz="1150" b="0" i="0">
-                <a:solidFill>
-                  <a:srgbClr val="8EDBD4"/>
-                </a:solidFill>
-                <a:latin typeface="Arial"/>
-              </a:rPr>
-              <a:t>Surface shape and potential evolve together</a:t>
-            </a:r>
-          </a:p>
-        </p:txBody>
-      </p:sp>
-      <p:sp>
-        <p:nvSpPr>
-          <p:cNvPr id="21" name="C3-E15 text 19" descr="sci-ppt:o019"/>
-          <p:cNvSpPr txBox="1"/>
-          <p:nvPr/>
-        </p:nvSpPr>
-        <p:spPr>
-          <a:xfrm>
-            <a:off x="320040" y="5870448"/>
-            <a:ext cx="11430000" cy="292608"/>
-          </a:xfrm>
-          <a:prstGeom prst="rect">
-            <a:avLst/>
-          </a:prstGeom>
-          <a:noFill/>
-          <a:effectLst/>
-        </p:spPr>
-        <p:txBody>
-          <a:bodyPr wrap="square" lIns="27432" rIns="27432" tIns="18288" bIns="18288" anchor="ctr">
-            <a:spAutoFit/>
-          </a:bodyPr>
-          <a:lstStyle/>
-          <a:p>
-            <a:pPr algn="l">
-              <a:spcAft>
-                <a:spcPts val="0"/>
-              </a:spcAft>
-            </a:pPr>
-            <a:r>
-              <a:rPr sz="1150" b="0" i="0">
-                <a:solidFill>
-                  <a:srgbClr val="8EDBD4"/>
-                </a:solidFill>
-                <a:latin typeface="Arial"/>
-              </a:rPr>
-              <a:t>Different interfaces can have different surface tensions</a:t>
-            </a:r>
-          </a:p>
-        </p:txBody>
-      </p:sp>
-      <p:sp>
-        <p:nvSpPr>
-          <p:cNvPr id="22" name="C3-E15 text 20" descr="sci-ppt:o020"/>
-          <p:cNvSpPr txBox="1"/>
-          <p:nvPr/>
-        </p:nvSpPr>
-        <p:spPr>
-          <a:xfrm>
-            <a:off x="320040" y="6473952"/>
-            <a:ext cx="11430000" cy="256032"/>
-          </a:xfrm>
-          <a:prstGeom prst="rect">
-            <a:avLst/>
-          </a:prstGeom>
-          <a:noFill/>
-          <a:effectLst/>
-        </p:spPr>
-        <p:txBody>
-          <a:bodyPr wrap="square" lIns="27432" rIns="27432" tIns="18288" bIns="18288" anchor="ctr">
+          <a:bodyPr wrap="none" lIns="18288" rIns="18288" tIns="18288" bIns="18288" anchor="t">
             <a:spAutoFit/>
           </a:bodyPr>
           <a:lstStyle/>
@@ -3863,7 +4065,7 @@
                 </a:solidFill>
                 <a:latin typeface="Arial"/>
               </a:rPr>
-              <a:t>Model schematic; geometry is not to scale.</a:t>
+              <a:t>Signed curvature and material Bernoulli condition of Eq. C3-E15 (σ = 0.072 N/m for the example).</a:t>
             </a:r>
           </a:p>
         </p:txBody>
